--- a/outputs/ophthalmology-batch-20261011/endothelium/slides_editable.pptx
+++ b/outputs/ophthalmology-batch-20261011/endothelium/slides_editable.pptx
@@ -877,7 +877,7 @@
           <a:p/>
           <a:p>
             <a:r>
-              <a:t>endothelium-12 气体固定：过滤空气或10%~14% C3F8固定；气少/吸收快增脱离，过多致瞳孔阻滞。复杂DSEK可黏弹剂，DMEK不能黏弹剂固定。</a:t>
+              <a:t>endothelium-12 气体固定：过滤空气或10%~14% C₃F₈固定；气少/吸收快增脱离，过多致瞳孔阻滞。复杂DSEK可黏弹剂，DMEK不能使用黏弹剂固定植片。</a:t>
             </a:r>
           </a:p>
           <a:p>
@@ -1069,7 +1069,7 @@
           <a:lstStyle/>
           <a:p>
             <a:r>
-              <a:t>endothelium-16 阻滞性青光眼：推荐6:00周边虹膜切除防阻滞；术后早期2~6 h密切看眼压，必要时释过量前房气体，避免不可逆损伤。具体眼压数值切点未明确。</a:t>
+              <a:t>endothelium-16 阻滞性青光眼：推荐6点钟方位周边虹膜切除防阻滞；术后早期2~6 h密切看眼压，必要时释过量前房气体，避免不可逆损伤。具体眼压数值切点未明确。</a:t>
             </a:r>
           </a:p>
           <a:p>
@@ -1101,7 +1101,7 @@
           <a:p/>
           <a:p>
             <a:r>
-              <a:t>endothelium-18 术后检查：第1天气体填大部前房但坐位避开6:00虹膜切除口；可疑脱离及时前节OCT；透明后尽早内皮计数并定期复查。</a:t>
+              <a:t>endothelium-18 术后检查：第1天气体填大部前房但坐位避开6点钟方位虹膜切除口；可疑脱离及时前节OCT；透明后尽早内皮计数并定期复查。</a:t>
             </a:r>
           </a:p>
           <a:p>
@@ -1437,7 +1437,7 @@
           <a:p/>
           <a:p>
             <a:r>
-              <a:t>endothelium-12 气体固定：过滤空气或10%~14% C3F8固定；气少/吸收快增脱离，过多致瞳孔阻滞。复杂DSEK可黏弹剂，DMEK不能黏弹剂固定。</a:t>
+              <a:t>endothelium-12 气体固定：过滤空气或10%~14% C₃F₈固定；气少/吸收快增脱离，过多致瞳孔阻滞。复杂DSEK可黏弹剂，DMEK不能使用黏弹剂固定植片。</a:t>
             </a:r>
           </a:p>
           <a:p>
@@ -1485,7 +1485,7 @@
           <a:p/>
           <a:p>
             <a:r>
-              <a:t>endothelium-16 阻滞性青光眼：推荐6:00周边虹膜切除防阻滞；术后早期2~6 h密切看眼压，必要时释过量前房气体，避免不可逆损伤。具体眼压数值切点未明确。</a:t>
+              <a:t>endothelium-16 阻滞性青光眼：推荐6点钟方位周边虹膜切除防阻滞；术后早期2~6 h密切看眼压，必要时释过量前房气体，避免不可逆损伤。具体眼压数值切点未明确。</a:t>
             </a:r>
           </a:p>
           <a:p>
@@ -1517,7 +1517,7 @@
           <a:p/>
           <a:p>
             <a:r>
-              <a:t>endothelium-18 术后检查：第1天气体填大部前房但坐位避开6:00虹膜切除口；可疑脱离及时前节OCT；透明后尽早内皮计数并定期复查。</a:t>
+              <a:t>endothelium-18 术后检查：第1天气体填大部前房但坐位避开6点钟方位虹膜切除口；可疑脱离及时前节OCT；透明后尽早内皮计数并定期复查。</a:t>
             </a:r>
           </a:p>
           <a:p>
@@ -8432,7 +8432,7 @@
       </p:sp>
       <p:sp>
         <p:nvSpPr>
-          <p:cNvPr id="19" name="过滤空气或10%~14% C3F8固定；气少/吸收快增脱离，过多致瞳孔阻滞。复杂DSEK可黏弹剂，D"/>
+          <p:cNvPr id="19" name="过滤空气或10%~14% C₃F₈固定；气少/吸收快增脱离，过多致瞳孔阻滞。复杂DSEK可黏弹剂，D"/>
           <p:cNvSpPr txBox="1"/>
           <p:nvPr/>
         </p:nvSpPr>
@@ -8472,7 +8472,51 @@
                 <a:ea typeface="Microsoft YaHei"/>
                 <a:cs typeface="Microsoft YaHei"/>
               </a:rPr>
-              <a:t>过滤空气或10%~14% C3F8固定；气少/吸收快增脱离，过多致瞳孔阻滞。复杂DSEK可黏弹剂，DMEK</a:t>
+              <a:t>过滤空气或10%~14% C</a:t>
+            </a:r>
+            <a:r>
+              <a:rPr sz="1700" b="0" lang="zh-CN">
+                <a:solidFill>
+                  <a:srgbClr val="1E2E3B"/>
+                </a:solidFill>
+                <a:latin typeface="Arial"/>
+                <a:ea typeface="Arial"/>
+                <a:cs typeface="Arial"/>
+              </a:rPr>
+              <a:t>₃</a:t>
+            </a:r>
+            <a:r>
+              <a:rPr sz="1700" b="0" lang="zh-CN">
+                <a:solidFill>
+                  <a:srgbClr val="1E2E3B"/>
+                </a:solidFill>
+                <a:latin typeface="Microsoft YaHei"/>
+                <a:ea typeface="Microsoft YaHei"/>
+                <a:cs typeface="Microsoft YaHei"/>
+              </a:rPr>
+              <a:t>F</a:t>
+            </a:r>
+            <a:r>
+              <a:rPr sz="1700" b="0" lang="zh-CN">
+                <a:solidFill>
+                  <a:srgbClr val="1E2E3B"/>
+                </a:solidFill>
+                <a:latin typeface="Arial"/>
+                <a:ea typeface="Arial"/>
+                <a:cs typeface="Arial"/>
+              </a:rPr>
+              <a:t>₈</a:t>
+            </a:r>
+            <a:r>
+              <a:rPr sz="1700" b="0" lang="zh-CN">
+                <a:solidFill>
+                  <a:srgbClr val="1E2E3B"/>
+                </a:solidFill>
+                <a:latin typeface="Microsoft YaHei"/>
+                <a:ea typeface="Microsoft YaHei"/>
+                <a:cs typeface="Microsoft YaHei"/>
+              </a:rPr>
+              <a:t>固定；气少/吸收快增脱离，过多致瞳孔阻滞。复杂DSEK可黏弹剂，DMEK</a:t>
             </a:r>
           </a:p>
           <a:p>
@@ -8496,7 +8540,7 @@
                 <a:ea typeface="Microsoft YaHei"/>
                 <a:cs typeface="Microsoft YaHei"/>
               </a:rPr>
-              <a:t>不能黏弹剂固定。</a:t>
+              <a:t>不能使用黏弹剂固定植片。</a:t>
             </a:r>
           </a:p>
         </p:txBody>
@@ -9958,7 +10002,7 @@
       </p:sp>
       <p:sp>
         <p:nvSpPr>
-          <p:cNvPr id="9" name="推荐6:00周边虹膜切除防阻滞；术后早期2~6 h密切看眼压，必要时释过量前房气体，避免不可逆损伤。"/>
+          <p:cNvPr id="9" name="推荐6点钟方位周边虹膜切除防阻滞；术后早期2~6 h密切看眼压，必要时释过量前房气体，避免不可逆损伤"/>
           <p:cNvSpPr txBox="1"/>
           <p:nvPr/>
         </p:nvSpPr>
@@ -9998,7 +10042,7 @@
                 <a:ea typeface="Microsoft YaHei"/>
                 <a:cs typeface="Microsoft YaHei"/>
               </a:rPr>
-              <a:t>推荐6:00周边虹膜切除防阻滞；术后早期2~6 h密切看眼压，必要时释过量前房气体，避免不可逆损</a:t>
+              <a:t>推荐6点钟方位周边虹膜切除防阻滞；术后早期2~6 h密切看眼压，必要时释过量前房气体，避免不可</a:t>
             </a:r>
           </a:p>
           <a:p>
@@ -10022,7 +10066,7 @@
                 <a:ea typeface="Microsoft YaHei"/>
                 <a:cs typeface="Microsoft YaHei"/>
               </a:rPr>
-              <a:t>伤。具体眼压数值切点未明确。</a:t>
+              <a:t>逆损伤。具体眼压数值切点未明确。</a:t>
             </a:r>
           </a:p>
         </p:txBody>
@@ -10464,7 +10508,7 @@
       </p:sp>
       <p:sp>
         <p:nvSpPr>
-          <p:cNvPr id="19" name="第1天气体填大部前房但坐位避开6:00虹膜切除口；可疑脱离及时前节OCT；透明后尽早内皮计数并定期复"/>
+          <p:cNvPr id="19" name="第1天气体填大部前房但坐位避开6点钟方位虹膜切除口；可疑脱离及时前节OCT；透明后尽早内皮计数并定期"/>
           <p:cNvSpPr txBox="1"/>
           <p:nvPr/>
         </p:nvSpPr>
@@ -10504,7 +10548,7 @@
                 <a:ea typeface="Microsoft YaHei"/>
                 <a:cs typeface="Microsoft YaHei"/>
               </a:rPr>
-              <a:t>第1天气体填大部前房但坐位避开6:00虹膜切除口；可疑脱离及时前节OCT；透明后尽早内皮计数并定</a:t>
+              <a:t>第1天气体填大部前房但坐位避开6点钟方位虹膜切除口；可疑脱离及时前节OCT；透明后尽早内皮计</a:t>
             </a:r>
           </a:p>
           <a:p>
@@ -10528,7 +10572,7 @@
                 <a:ea typeface="Microsoft YaHei"/>
                 <a:cs typeface="Microsoft YaHei"/>
               </a:rPr>
-              <a:t>期复查。</a:t>
+              <a:t>数并定期复查。</a:t>
             </a:r>
           </a:p>
         </p:txBody>
@@ -12407,7 +12451,7 @@
       </p:sp>
       <p:sp>
         <p:nvSpPr>
-          <p:cNvPr id="22" name="内皮≥2 500、直径7.75~8.00 mm；辨方向、非接触、周边虹膜切除及合适气体量。"/>
+          <p:cNvPr id="22" name="内皮密度≥2 500个/mm²、直径7.75~8.00 mm；辨方向、非接触、周边虹膜切除及合适气体"/>
           <p:cNvSpPr txBox="1"/>
           <p:nvPr/>
         </p:nvSpPr>
@@ -12447,7 +12491,7 @@
                 <a:ea typeface="Microsoft YaHei"/>
                 <a:cs typeface="Microsoft YaHei"/>
               </a:rPr>
-              <a:t>内皮≥2 500、直径7.75~8.00 mm；辨方向、非接触、周边虹膜</a:t>
+              <a:t>内皮密度≥2 500个/mm²、直径7.75~8.00 mm；辨方向、非接</a:t>
             </a:r>
           </a:p>
           <a:p>
@@ -12471,7 +12515,7 @@
                 <a:ea typeface="Microsoft YaHei"/>
                 <a:cs typeface="Microsoft YaHei"/>
               </a:rPr>
-              <a:t>切除及合适气体量。</a:t>
+              <a:t>触、周边虹膜切除及合适气体量。</a:t>
             </a:r>
           </a:p>
         </p:txBody>
@@ -12653,7 +12697,7 @@
       </p:sp>
       <p:sp>
         <p:nvSpPr>
-          <p:cNvPr id="27" name="2~6 h密切眼压，阻滞必要释气；OCT见大范围脱离：DSEK&gt;1/3、DMEK&gt;1/4 → 再注气"/>
+          <p:cNvPr id="27" name="2~6 h密切眼压，阻滞必要释气；OCT见大范围脱离：DSEK脱离&gt;1/3、DMEK脱离&gt;1/4 →"/>
           <p:cNvSpPr txBox="1"/>
           <p:nvPr/>
         </p:nvSpPr>
@@ -12693,7 +12737,7 @@
                 <a:ea typeface="Microsoft YaHei"/>
                 <a:cs typeface="Microsoft YaHei"/>
               </a:rPr>
-              <a:t>2~6 h密切眼压，阻滞必要释气；OCT见大范围脱离：DSEK</a:t>
+              <a:t>2~6 h密切眼压，阻滞必要释气；OCT见大范围脱离：DSEK脱离</a:t>
             </a:r>
           </a:p>
           <a:p>
@@ -12717,7 +12761,7 @@
                 <a:ea typeface="Microsoft YaHei"/>
                 <a:cs typeface="Microsoft YaHei"/>
               </a:rPr>
-              <a:t>&gt;1/3、DMEK&gt;1/4 → 再注气。</a:t>
+              <a:t>&gt;1/3、DMEK脱离&gt;1/4 → 再注气。</a:t>
             </a:r>
           </a:p>
         </p:txBody>
